--- a/clientes/flavia-muccelin/Cultura-Organizacional-Forma-e-My-Home.pptx
+++ b/clientes/flavia-muccelin/Cultura-Organizacional-Forma-e-My-Home.pptx
@@ -4431,8 +4431,8 @@
         </p:nvSpPr>
         <p:spPr>
           <a:xfrm>
-            <a:off x="2011680" y="7818222"/>
-            <a:ext cx="11521440" cy="292608"/>
+            <a:off x="2011680" y="7845755"/>
+            <a:ext cx="11521440" cy="859333"/>
           </a:xfrm>
           <a:prstGeom prst="rect">
             <a:avLst/>
@@ -4447,7 +4447,7 @@
           <a:p>
             <a:pPr algn="l">
               <a:lnSpc>
-                <a:spcPct val="140000"/>
+                <a:spcPct val="130000"/>
               </a:lnSpc>
             </a:pPr>
             <a:r>
@@ -4457,38 +4457,8 @@
                 </a:solidFill>
                 <a:latin typeface="Outfit 1 Semi-Bold"/>
               </a:rPr>
-              <a:t>IMAGEM</a:t>
-            </a:r>
-          </a:p>
-        </p:txBody>
-      </p:sp>
-      <p:sp>
-        <p:nvSpPr>
-          <p:cNvPr id="9" name="TextBox 8"/>
-          <p:cNvSpPr txBox="1"/>
-          <p:nvPr/>
-        </p:nvSpPr>
-        <p:spPr>
-          <a:xfrm>
-            <a:off x="2011680" y="8220558"/>
-            <a:ext cx="11521440" cy="466242"/>
-          </a:xfrm>
-          <a:prstGeom prst="rect">
-            <a:avLst/>
-          </a:prstGeom>
-          <a:noFill/>
-        </p:spPr>
-        <p:txBody>
-          <a:bodyPr wrap="square" anchor="t" lIns="0" rIns="0" tIns="0" bIns="0">
-            <a:spAutoFit/>
-          </a:bodyPr>
-          <a:lstStyle/>
-          <a:p>
-            <a:pPr algn="l">
-              <a:lnSpc>
-                <a:spcPct val="140000"/>
-              </a:lnSpc>
-            </a:pPr>
+              <a:t>IMAGEM   </a:t>
+            </a:r>
             <a:r>
               <a:rPr sz="1700" i="0" b="0">
                 <a:solidFill>
@@ -6043,8 +6013,8 @@
         </p:nvSpPr>
         <p:spPr>
           <a:xfrm>
-            <a:off x="2011680" y="7818222"/>
-            <a:ext cx="11521440" cy="292608"/>
+            <a:off x="2011680" y="7845755"/>
+            <a:ext cx="11521440" cy="859333"/>
           </a:xfrm>
           <a:prstGeom prst="rect">
             <a:avLst/>
@@ -6059,7 +6029,7 @@
           <a:p>
             <a:pPr algn="l">
               <a:lnSpc>
-                <a:spcPct val="140000"/>
+                <a:spcPct val="130000"/>
               </a:lnSpc>
             </a:pPr>
             <a:r>
@@ -6069,38 +6039,8 @@
                 </a:solidFill>
                 <a:latin typeface="Outfit 1 Semi-Bold"/>
               </a:rPr>
-              <a:t>IMAGEM</a:t>
-            </a:r>
-          </a:p>
-        </p:txBody>
-      </p:sp>
-      <p:sp>
-        <p:nvSpPr>
-          <p:cNvPr id="9" name="TextBox 8"/>
-          <p:cNvSpPr txBox="1"/>
-          <p:nvPr/>
-        </p:nvSpPr>
-        <p:spPr>
-          <a:xfrm>
-            <a:off x="2011680" y="8220558"/>
-            <a:ext cx="11521440" cy="466242"/>
-          </a:xfrm>
-          <a:prstGeom prst="rect">
-            <a:avLst/>
-          </a:prstGeom>
-          <a:noFill/>
-        </p:spPr>
-        <p:txBody>
-          <a:bodyPr wrap="square" anchor="t" lIns="0" rIns="0" tIns="0" bIns="0">
-            <a:spAutoFit/>
-          </a:bodyPr>
-          <a:lstStyle/>
-          <a:p>
-            <a:pPr algn="l">
-              <a:lnSpc>
-                <a:spcPct val="140000"/>
-              </a:lnSpc>
-            </a:pPr>
+              <a:t>IMAGEM   </a:t>
+            </a:r>
             <a:r>
               <a:rPr sz="1700" i="0" b="0">
                 <a:solidFill>
@@ -7096,8 +7036,8 @@
         </p:nvSpPr>
         <p:spPr>
           <a:xfrm>
-            <a:off x="2011680" y="7818222"/>
-            <a:ext cx="11521440" cy="292608"/>
+            <a:off x="2011680" y="7845755"/>
+            <a:ext cx="11521440" cy="859333"/>
           </a:xfrm>
           <a:prstGeom prst="rect">
             <a:avLst/>
@@ -7112,7 +7052,7 @@
           <a:p>
             <a:pPr algn="l">
               <a:lnSpc>
-                <a:spcPct val="140000"/>
+                <a:spcPct val="130000"/>
               </a:lnSpc>
             </a:pPr>
             <a:r>
@@ -7122,38 +7062,8 @@
                 </a:solidFill>
                 <a:latin typeface="Outfit 1 Semi-Bold"/>
               </a:rPr>
-              <a:t>IMAGEM</a:t>
-            </a:r>
-          </a:p>
-        </p:txBody>
-      </p:sp>
-      <p:sp>
-        <p:nvSpPr>
-          <p:cNvPr id="9" name="TextBox 8"/>
-          <p:cNvSpPr txBox="1"/>
-          <p:nvPr/>
-        </p:nvSpPr>
-        <p:spPr>
-          <a:xfrm>
-            <a:off x="2011680" y="8220558"/>
-            <a:ext cx="11521440" cy="466242"/>
-          </a:xfrm>
-          <a:prstGeom prst="rect">
-            <a:avLst/>
-          </a:prstGeom>
-          <a:noFill/>
-        </p:spPr>
-        <p:txBody>
-          <a:bodyPr wrap="square" anchor="t" lIns="0" rIns="0" tIns="0" bIns="0">
-            <a:spAutoFit/>
-          </a:bodyPr>
-          <a:lstStyle/>
-          <a:p>
-            <a:pPr algn="l">
-              <a:lnSpc>
-                <a:spcPct val="140000"/>
-              </a:lnSpc>
-            </a:pPr>
+              <a:t>IMAGEM   </a:t>
+            </a:r>
             <a:r>
               <a:rPr sz="1700" i="0" b="0">
                 <a:solidFill>
@@ -9480,8 +9390,8 @@
         </p:nvSpPr>
         <p:spPr>
           <a:xfrm>
-            <a:off x="2011680" y="7818222"/>
-            <a:ext cx="11521440" cy="292608"/>
+            <a:off x="2011680" y="8220558"/>
+            <a:ext cx="11521440" cy="484530"/>
           </a:xfrm>
           <a:prstGeom prst="rect">
             <a:avLst/>
@@ -9496,7 +9406,7 @@
           <a:p>
             <a:pPr algn="l">
               <a:lnSpc>
-                <a:spcPct val="140000"/>
+                <a:spcPct val="130000"/>
               </a:lnSpc>
             </a:pPr>
             <a:r>
@@ -9506,38 +9416,8 @@
                 </a:solidFill>
                 <a:latin typeface="Outfit 1 Semi-Bold"/>
               </a:rPr>
-              <a:t>IMAGEM</a:t>
-            </a:r>
-          </a:p>
-        </p:txBody>
-      </p:sp>
-      <p:sp>
-        <p:nvSpPr>
-          <p:cNvPr id="8" name="TextBox 7"/>
-          <p:cNvSpPr txBox="1"/>
-          <p:nvPr/>
-        </p:nvSpPr>
-        <p:spPr>
-          <a:xfrm>
-            <a:off x="2011680" y="8220558"/>
-            <a:ext cx="11521440" cy="466242"/>
-          </a:xfrm>
-          <a:prstGeom prst="rect">
-            <a:avLst/>
-          </a:prstGeom>
-          <a:noFill/>
-        </p:spPr>
-        <p:txBody>
-          <a:bodyPr wrap="square" anchor="t" lIns="0" rIns="0" tIns="0" bIns="0">
-            <a:spAutoFit/>
-          </a:bodyPr>
-          <a:lstStyle/>
-          <a:p>
-            <a:pPr algn="l">
-              <a:lnSpc>
-                <a:spcPct val="140000"/>
-              </a:lnSpc>
-            </a:pPr>
+              <a:t>IMAGEM   </a:t>
+            </a:r>
             <a:r>
               <a:rPr sz="1700" i="0" b="0">
                 <a:solidFill>
@@ -11197,8 +11077,8 @@
         </p:nvSpPr>
         <p:spPr>
           <a:xfrm>
-            <a:off x="2011680" y="7818222"/>
-            <a:ext cx="11521440" cy="292608"/>
+            <a:off x="2011680" y="7845755"/>
+            <a:ext cx="11521440" cy="859333"/>
           </a:xfrm>
           <a:prstGeom prst="rect">
             <a:avLst/>
@@ -11213,7 +11093,7 @@
           <a:p>
             <a:pPr algn="l">
               <a:lnSpc>
-                <a:spcPct val="140000"/>
+                <a:spcPct val="130000"/>
               </a:lnSpc>
             </a:pPr>
             <a:r>
@@ -11223,38 +11103,8 @@
                 </a:solidFill>
                 <a:latin typeface="Outfit 1 Semi-Bold"/>
               </a:rPr>
-              <a:t>IMAGEM</a:t>
-            </a:r>
-          </a:p>
-        </p:txBody>
-      </p:sp>
-      <p:sp>
-        <p:nvSpPr>
-          <p:cNvPr id="9" name="TextBox 8"/>
-          <p:cNvSpPr txBox="1"/>
-          <p:nvPr/>
-        </p:nvSpPr>
-        <p:spPr>
-          <a:xfrm>
-            <a:off x="2011680" y="8220558"/>
-            <a:ext cx="11521440" cy="466242"/>
-          </a:xfrm>
-          <a:prstGeom prst="rect">
-            <a:avLst/>
-          </a:prstGeom>
-          <a:noFill/>
-        </p:spPr>
-        <p:txBody>
-          <a:bodyPr wrap="square" anchor="t" lIns="0" rIns="0" tIns="0" bIns="0">
-            <a:spAutoFit/>
-          </a:bodyPr>
-          <a:lstStyle/>
-          <a:p>
-            <a:pPr algn="l">
-              <a:lnSpc>
-                <a:spcPct val="140000"/>
-              </a:lnSpc>
-            </a:pPr>
+              <a:t>IMAGEM   </a:t>
+            </a:r>
             <a:r>
               <a:rPr sz="1700" i="0" b="0">
                 <a:solidFill>
@@ -12246,8 +12096,8 @@
         </p:nvSpPr>
         <p:spPr>
           <a:xfrm>
-            <a:off x="2011680" y="7818222"/>
-            <a:ext cx="11521440" cy="292608"/>
+            <a:off x="2011680" y="8220558"/>
+            <a:ext cx="11521440" cy="484530"/>
           </a:xfrm>
           <a:prstGeom prst="rect">
             <a:avLst/>
@@ -12262,7 +12112,7 @@
           <a:p>
             <a:pPr algn="l">
               <a:lnSpc>
-                <a:spcPct val="140000"/>
+                <a:spcPct val="130000"/>
               </a:lnSpc>
             </a:pPr>
             <a:r>
@@ -12272,38 +12122,8 @@
                 </a:solidFill>
                 <a:latin typeface="Outfit 1 Semi-Bold"/>
               </a:rPr>
-              <a:t>IMAGEM</a:t>
-            </a:r>
-          </a:p>
-        </p:txBody>
-      </p:sp>
-      <p:sp>
-        <p:nvSpPr>
-          <p:cNvPr id="9" name="TextBox 8"/>
-          <p:cNvSpPr txBox="1"/>
-          <p:nvPr/>
-        </p:nvSpPr>
-        <p:spPr>
-          <a:xfrm>
-            <a:off x="2011680" y="8220558"/>
-            <a:ext cx="11521440" cy="466242"/>
-          </a:xfrm>
-          <a:prstGeom prst="rect">
-            <a:avLst/>
-          </a:prstGeom>
-          <a:noFill/>
-        </p:spPr>
-        <p:txBody>
-          <a:bodyPr wrap="square" anchor="t" lIns="0" rIns="0" tIns="0" bIns="0">
-            <a:spAutoFit/>
-          </a:bodyPr>
-          <a:lstStyle/>
-          <a:p>
-            <a:pPr algn="l">
-              <a:lnSpc>
-                <a:spcPct val="140000"/>
-              </a:lnSpc>
-            </a:pPr>
+              <a:t>IMAGEM   </a:t>
+            </a:r>
             <a:r>
               <a:rPr sz="1700" i="0" b="0">
                 <a:solidFill>

--- a/clientes/flavia-muccelin/Cultura-Organizacional-Forma-e-My-Home.pptx
+++ b/clientes/flavia-muccelin/Cultura-Organizacional-Forma-e-My-Home.pptx
@@ -3486,7 +3486,7 @@
                 </a:solidFill>
                 <a:latin typeface="Outfit 1 Light"/>
               </a:rPr>
-              <a:t>A nossa crença central.</a:t>
+              <a:t>A crença central.</a:t>
             </a:r>
           </a:p>
         </p:txBody>
@@ -4335,7 +4335,7 @@
                 </a:solidFill>
                 <a:latin typeface="Outfit 1 Light"/>
               </a:rPr>
-              <a:t>NOSSO JEITO DE TRABALHAR</a:t>
+              <a:t>O JEITO DE TRABALHAR</a:t>
             </a:r>
           </a:p>
         </p:txBody>
@@ -4418,7 +4418,7 @@
                 </a:solidFill>
                 <a:latin typeface="Outfit 1 Light"/>
               </a:rPr>
-              <a:t>Os comportamentos e as relações que nos definem.</a:t>
+              <a:t>Os comportamentos e as relações que a definem.</a:t>
             </a:r>
           </a:p>
         </p:txBody>
@@ -5052,7 +5052,7 @@
                 </a:solidFill>
                 <a:latin typeface="Outfit 1 Light"/>
               </a:rPr>
-              <a:t>Letícia relata correções feitas pela própria equipe, Mapinha descreve peças refeitas por não atenderem ao padrão e Joel destaca o envolvimento com problemas que afetam o cliente, mesmo quando surgem de terceiros. Nossa responsabilidade vai além da execução individual: ela alcança o resultado que construímos juntos.</a:t>
+              <a:t>Letícia relata correções feitas pela própria equipe, Mapinha descreve peças refeitas por não atenderem ao padrão e Joel destaca o envolvimento com problemas que afetam o cliente, mesmo quando surgem de terceiros. A responsabilidade vai além da execução individual: alcança o resultado construído em conjunto.</a:t>
             </a:r>
           </a:p>
         </p:txBody>
@@ -5353,7 +5353,7 @@
                 </a:solidFill>
                 <a:latin typeface="Outfit 1 Light"/>
               </a:rPr>
-              <a:t>A PROXIMIDADE É UMA FORÇA DA NOSSA CULTURA.</a:t>
+              <a:t>A PROXIMIDADE É UMA FORÇA DESTA CULTURA.</a:t>
             </a:r>
           </a:p>
         </p:txBody>
@@ -5917,7 +5917,7 @@
                 </a:solidFill>
                 <a:latin typeface="Outfit 1 Light"/>
               </a:rPr>
-              <a:t>NOSSA CULTURA NA PRÁTICA</a:t>
+              <a:t>A CULTURA NA PRÁTICA</a:t>
             </a:r>
           </a:p>
         </p:txBody>
@@ -6000,7 +6000,7 @@
                 </a:solidFill>
                 <a:latin typeface="Outfit 1 Light"/>
               </a:rPr>
-              <a:t>Como nossas crenças aparecem no dia a dia.</a:t>
+              <a:t>Como as crenças aparecem no dia a dia.</a:t>
             </a:r>
           </a:p>
         </p:txBody>
@@ -6940,7 +6940,7 @@
                 </a:solidFill>
                 <a:latin typeface="Outfit 1 Light"/>
               </a:rPr>
-              <a:t>NOSSO FUTURO</a:t>
+              <a:t>O FUTURO</a:t>
             </a:r>
           </a:p>
         </p:txBody>
@@ -7023,7 +7023,7 @@
                 </a:solidFill>
                 <a:latin typeface="Outfit 1 Light"/>
               </a:rPr>
-              <a:t>O que precisamos preservar e desenvolver.</a:t>
+              <a:t>O que preservar e o que desenvolver.</a:t>
             </a:r>
           </a:p>
         </p:txBody>
@@ -7186,7 +7186,7 @@
                 </a:solidFill>
                 <a:latin typeface="Outfit 1 Bold"/>
               </a:rPr>
-              <a:t>O QUE NOS TORNA</a:t>
+              <a:t>O QUE DEFINE</a:t>
             </a:r>
           </a:p>
           <a:p>
@@ -7202,7 +7202,7 @@
                 </a:solidFill>
                 <a:latin typeface="Outfit 1 Bold"/>
               </a:rPr>
-              <a:t>QUEM SOMOS</a:t>
+              <a:t>ESTA CULTURA</a:t>
             </a:r>
           </a:p>
         </p:txBody>
@@ -7699,7 +7699,7 @@
                 </a:solidFill>
                 <a:latin typeface="Outfit 1 Light"/>
               </a:rPr>
-              <a:t>CRESCER SEM PERDER O QUE NOS TORNA DIFERENTES.</a:t>
+              <a:t>CRESCER SEM PERDER O QUE TORNA ESTAS EMPRESAS DIFERENTES.</a:t>
             </a:r>
           </a:p>
         </p:txBody>
@@ -7712,7 +7712,7 @@
         </p:nvSpPr>
         <p:spPr>
           <a:xfrm>
-            <a:off x="2011680" y="2660538"/>
+            <a:off x="2011680" y="3414552"/>
             <a:ext cx="14264640" cy="10973"/>
           </a:xfrm>
           <a:prstGeom prst="rect">
@@ -7756,7 +7756,7 @@
         </p:nvSpPr>
         <p:spPr>
           <a:xfrm>
-            <a:off x="2011680" y="3232404"/>
+            <a:off x="2011680" y="3762024"/>
             <a:ext cx="4754880" cy="256032"/>
           </a:xfrm>
           <a:prstGeom prst="rect">
@@ -7782,7 +7782,7 @@
                 </a:solidFill>
                 <a:latin typeface="Outfit 1 Semi-Bold"/>
               </a:rPr>
-              <a:t>O QUE PRECISAMOS PRESERVAR</a:t>
+              <a:t>O QUE PRESERVAR</a:t>
             </a:r>
           </a:p>
         </p:txBody>
@@ -7795,7 +7795,7 @@
         </p:nvSpPr>
         <p:spPr>
           <a:xfrm>
-            <a:off x="7132320" y="3232404"/>
+            <a:off x="7132320" y="3762024"/>
             <a:ext cx="9144000" cy="256032"/>
           </a:xfrm>
           <a:prstGeom prst="rect">
@@ -7821,7 +7821,7 @@
                 </a:solidFill>
                 <a:latin typeface="Outfit 1 Semi-Bold"/>
               </a:rPr>
-              <a:t>O QUE PRECISAMOS DESENVOLVER</a:t>
+              <a:t>O QUE DESENVOLVER</a:t>
             </a:r>
           </a:p>
         </p:txBody>
@@ -7834,7 +7834,7 @@
         </p:nvSpPr>
         <p:spPr>
           <a:xfrm>
-            <a:off x="2011680" y="3744468"/>
+            <a:off x="2011680" y="4274088"/>
             <a:ext cx="14264640" cy="10973"/>
           </a:xfrm>
           <a:prstGeom prst="rect">
@@ -7878,7 +7878,7 @@
         </p:nvSpPr>
         <p:spPr>
           <a:xfrm>
-            <a:off x="2011680" y="3982212"/>
+            <a:off x="2011680" y="4511832"/>
             <a:ext cx="4754880" cy="256032"/>
           </a:xfrm>
           <a:prstGeom prst="rect">
@@ -7917,8 +7917,8 @@
         </p:nvSpPr>
         <p:spPr>
           <a:xfrm>
-            <a:off x="7132320" y="3909060"/>
-            <a:ext cx="9144000" cy="619963"/>
+            <a:off x="7132320" y="4438680"/>
+            <a:ext cx="9144000" cy="526009"/>
           </a:xfrm>
           <a:prstGeom prst="rect">
             <a:avLst/>
@@ -7937,7 +7937,7 @@
               </a:lnSpc>
             </a:pPr>
             <a:r>
-              <a:rPr sz="2100" i="0" b="0">
+              <a:rPr sz="1700" i="0" b="0">
                 <a:solidFill>
                   <a:srgbClr val="1C1C1A"/>
                 </a:solidFill>
@@ -7956,7 +7956,7 @@
         </p:nvSpPr>
         <p:spPr>
           <a:xfrm>
-            <a:off x="2011680" y="4602175"/>
+            <a:off x="2011680" y="5037841"/>
             <a:ext cx="14264640" cy="10973"/>
           </a:xfrm>
           <a:prstGeom prst="rect">
@@ -8000,7 +8000,7 @@
         </p:nvSpPr>
         <p:spPr>
           <a:xfrm>
-            <a:off x="2011680" y="4839919"/>
+            <a:off x="2011680" y="5275585"/>
             <a:ext cx="4754880" cy="256032"/>
           </a:xfrm>
           <a:prstGeom prst="rect">
@@ -8039,8 +8039,8 @@
         </p:nvSpPr>
         <p:spPr>
           <a:xfrm>
-            <a:off x="7132320" y="4766767"/>
-            <a:ext cx="9144000" cy="619963"/>
+            <a:off x="7132320" y="5202433"/>
+            <a:ext cx="9144000" cy="526009"/>
           </a:xfrm>
           <a:prstGeom prst="rect">
             <a:avLst/>
@@ -8059,7 +8059,7 @@
               </a:lnSpc>
             </a:pPr>
             <a:r>
-              <a:rPr sz="2100" i="0" b="0">
+              <a:rPr sz="1700" i="0" b="0">
                 <a:solidFill>
                   <a:srgbClr val="1C1C1A"/>
                 </a:solidFill>
@@ -8078,7 +8078,7 @@
         </p:nvSpPr>
         <p:spPr>
           <a:xfrm>
-            <a:off x="2011680" y="5459882"/>
+            <a:off x="2011680" y="5801594"/>
             <a:ext cx="14264640" cy="10973"/>
           </a:xfrm>
           <a:prstGeom prst="rect">
@@ -8122,7 +8122,7 @@
         </p:nvSpPr>
         <p:spPr>
           <a:xfrm>
-            <a:off x="2011680" y="5697626"/>
+            <a:off x="2011680" y="6039338"/>
             <a:ext cx="4754880" cy="256032"/>
           </a:xfrm>
           <a:prstGeom prst="rect">
@@ -8161,8 +8161,8 @@
         </p:nvSpPr>
         <p:spPr>
           <a:xfrm>
-            <a:off x="7132320" y="5624474"/>
-            <a:ext cx="9144000" cy="619963"/>
+            <a:off x="7132320" y="5966186"/>
+            <a:ext cx="9144000" cy="526009"/>
           </a:xfrm>
           <a:prstGeom prst="rect">
             <a:avLst/>
@@ -8181,7 +8181,7 @@
               </a:lnSpc>
             </a:pPr>
             <a:r>
-              <a:rPr sz="2100" i="0" b="0">
+              <a:rPr sz="1700" i="0" b="0">
                 <a:solidFill>
                   <a:srgbClr val="1C1C1A"/>
                 </a:solidFill>
@@ -8200,7 +8200,7 @@
         </p:nvSpPr>
         <p:spPr>
           <a:xfrm>
-            <a:off x="2011680" y="6317590"/>
+            <a:off x="2011680" y="6565346"/>
             <a:ext cx="14264640" cy="10973"/>
           </a:xfrm>
           <a:prstGeom prst="rect">
@@ -8244,7 +8244,7 @@
         </p:nvSpPr>
         <p:spPr>
           <a:xfrm>
-            <a:off x="2011680" y="6555334"/>
+            <a:off x="2011680" y="6803090"/>
             <a:ext cx="4754880" cy="256032"/>
           </a:xfrm>
           <a:prstGeom prst="rect">
@@ -8283,8 +8283,8 @@
         </p:nvSpPr>
         <p:spPr>
           <a:xfrm>
-            <a:off x="7132320" y="6482182"/>
-            <a:ext cx="9144000" cy="619963"/>
+            <a:off x="7132320" y="6729938"/>
+            <a:ext cx="9144000" cy="526009"/>
           </a:xfrm>
           <a:prstGeom prst="rect">
             <a:avLst/>
@@ -8303,7 +8303,7 @@
               </a:lnSpc>
             </a:pPr>
             <a:r>
-              <a:rPr sz="2100" i="0" b="0">
+              <a:rPr sz="1700" i="0" b="0">
                 <a:solidFill>
                   <a:srgbClr val="1C1C1A"/>
                 </a:solidFill>
@@ -8322,7 +8322,7 @@
         </p:nvSpPr>
         <p:spPr>
           <a:xfrm>
-            <a:off x="2011680" y="7175297"/>
+            <a:off x="2011680" y="7329099"/>
             <a:ext cx="14264640" cy="10973"/>
           </a:xfrm>
           <a:prstGeom prst="rect">
@@ -8366,7 +8366,7 @@
         </p:nvSpPr>
         <p:spPr>
           <a:xfrm>
-            <a:off x="2011680" y="7413041"/>
+            <a:off x="2011680" y="7566843"/>
             <a:ext cx="4754880" cy="256032"/>
           </a:xfrm>
           <a:prstGeom prst="rect">
@@ -8405,8 +8405,8 @@
         </p:nvSpPr>
         <p:spPr>
           <a:xfrm>
-            <a:off x="7132320" y="7339889"/>
-            <a:ext cx="9144000" cy="619963"/>
+            <a:off x="7132320" y="7493691"/>
+            <a:ext cx="9144000" cy="526009"/>
           </a:xfrm>
           <a:prstGeom prst="rect">
             <a:avLst/>
@@ -8425,7 +8425,7 @@
               </a:lnSpc>
             </a:pPr>
             <a:r>
-              <a:rPr sz="2100" i="0" b="0">
+              <a:rPr sz="1700" i="0" b="0">
                 <a:solidFill>
                   <a:srgbClr val="1C1C1A"/>
                 </a:solidFill>
@@ -8656,7 +8656,7 @@
                 </a:solidFill>
                 <a:latin typeface="Outfit 1 Light"/>
               </a:rPr>
-              <a:t>O desafio não é mudar nossa essência.</a:t>
+              <a:t>O desafio não é mudar a essência.</a:t>
             </a:r>
           </a:p>
           <a:p>
@@ -9294,7 +9294,7 @@
                 </a:solidFill>
                 <a:latin typeface="Outfit 1 Light"/>
               </a:rPr>
-              <a:t>construímos juntos.</a:t>
+              <a:t>se constrói em conjunto.</a:t>
             </a:r>
           </a:p>
         </p:txBody>
@@ -9377,7 +9377,7 @@
                 </a:solidFill>
                 <a:latin typeface="Outfit 1 Light"/>
               </a:rPr>
-              <a:t>O nosso princípio cultural. Duas marcas, uma cultura organizacional compartilhada.</a:t>
+              <a:t>O princípio cultural das duas marcas. Uma cultura organizacional compartilhada.</a:t>
             </a:r>
           </a:p>
         </p:txBody>
@@ -9719,7 +9719,7 @@
         </p:nvSpPr>
         <p:spPr>
           <a:xfrm>
-            <a:off x="2011680" y="3441184"/>
+            <a:off x="2011680" y="3586297"/>
             <a:ext cx="1188720" cy="27432"/>
           </a:xfrm>
           <a:prstGeom prst="rect">
@@ -9763,8 +9763,8 @@
         </p:nvSpPr>
         <p:spPr>
           <a:xfrm>
-            <a:off x="2011680" y="3843520"/>
-            <a:ext cx="14081760" cy="2499375"/>
+            <a:off x="2011680" y="3988633"/>
+            <a:ext cx="14081760" cy="2209150"/>
           </a:xfrm>
           <a:prstGeom prst="rect">
             <a:avLst/>
@@ -9783,13 +9783,13 @@
               </a:lnSpc>
             </a:pPr>
             <a:r>
-              <a:rPr sz="3737" i="0" b="0">
+              <a:rPr sz="3250" i="0" b="0">
                 <a:solidFill>
                   <a:srgbClr val="1C1C1A"/>
                 </a:solidFill>
                 <a:latin typeface="Outfit 1 Light"/>
               </a:rPr>
-              <a:t>O que nos conecta,</a:t>
+              <a:t>O que conecta as duas empresas,</a:t>
             </a:r>
           </a:p>
           <a:p>
@@ -9799,13 +9799,13 @@
               </a:lnSpc>
             </a:pPr>
             <a:r>
-              <a:rPr sz="3737" i="0" b="0">
+              <a:rPr sz="3250" i="0" b="0">
                 <a:solidFill>
                   <a:srgbClr val="1C1C1A"/>
                 </a:solidFill>
                 <a:latin typeface="Outfit 1 Light"/>
               </a:rPr>
-              <a:t>como trabalhamos</a:t>
+              <a:t>como elas trabalham</a:t>
             </a:r>
           </a:p>
           <a:p>
@@ -9815,13 +9815,13 @@
               </a:lnSpc>
             </a:pPr>
             <a:r>
-              <a:rPr sz="3737" i="0" b="0">
+              <a:rPr sz="3250" i="0" b="0">
                 <a:solidFill>
                   <a:srgbClr val="1C1C1A"/>
                 </a:solidFill>
                 <a:latin typeface="Outfit 1 Light"/>
               </a:rPr>
-              <a:t>e o que precisamos preservar ao crescer.</a:t>
+              <a:t>e o que precisa ser preservado no crescimento.</a:t>
             </a:r>
           </a:p>
         </p:txBody>
@@ -9958,7 +9958,7 @@
                 </a:solidFill>
                 <a:latin typeface="Outfit 1 Ultra-Bold"/>
               </a:rPr>
-              <a:t>NOSSA CULTURA</a:t>
+              <a:t>A CULTURA</a:t>
             </a:r>
           </a:p>
         </p:txBody>
@@ -10080,7 +10080,7 @@
                 </a:solidFill>
                 <a:latin typeface="Outfit 1 Light"/>
               </a:rPr>
-              <a:t>Nossa origem</a:t>
+              <a:t>A origem</a:t>
             </a:r>
           </a:p>
         </p:txBody>
@@ -10119,7 +10119,7 @@
                 </a:solidFill>
                 <a:latin typeface="Outfit 1 Light"/>
               </a:rPr>
-              <a:t>De onde vem nosso jeito de pensar.</a:t>
+              <a:t>De onde vem o jeito de pensar.</a:t>
             </a:r>
           </a:p>
         </p:txBody>
@@ -10241,7 +10241,7 @@
                 </a:solidFill>
                 <a:latin typeface="Outfit 1 Light"/>
               </a:rPr>
-              <a:t>Nossos valores</a:t>
+              <a:t>Os valores</a:t>
             </a:r>
           </a:p>
         </p:txBody>
@@ -10280,7 +10280,7 @@
                 </a:solidFill>
                 <a:latin typeface="Outfit 1 Light"/>
               </a:rPr>
-              <a:t>Aquilo em que acreditamos e como lideramos.</a:t>
+              <a:t>Aquilo em que a empresa acredita e como ela lidera.</a:t>
             </a:r>
           </a:p>
         </p:txBody>
@@ -10402,7 +10402,7 @@
                 </a:solidFill>
                 <a:latin typeface="Outfit 1 Light"/>
               </a:rPr>
-              <a:t>Nosso jeito de trabalhar</a:t>
+              <a:t>O jeito de trabalhar</a:t>
             </a:r>
           </a:p>
         </p:txBody>
@@ -10441,7 +10441,7 @@
                 </a:solidFill>
                 <a:latin typeface="Outfit 1 Light"/>
               </a:rPr>
-              <a:t>Os comportamentos e as relações que nos definem.</a:t>
+              <a:t>Os comportamentos e as relações que a definem.</a:t>
             </a:r>
           </a:p>
         </p:txBody>
@@ -10563,7 +10563,7 @@
                 </a:solidFill>
                 <a:latin typeface="Outfit 1 Light"/>
               </a:rPr>
-              <a:t>Nossa cultura na prática</a:t>
+              <a:t>A cultura na prática</a:t>
             </a:r>
           </a:p>
         </p:txBody>
@@ -10602,7 +10602,7 @@
                 </a:solidFill>
                 <a:latin typeface="Outfit 1 Light"/>
               </a:rPr>
-              <a:t>Como nossas crenças aparecem no dia a dia.</a:t>
+              <a:t>Como as crenças aparecem no dia a dia.</a:t>
             </a:r>
           </a:p>
         </p:txBody>
@@ -10724,7 +10724,7 @@
                 </a:solidFill>
                 <a:latin typeface="Outfit 1 Light"/>
               </a:rPr>
-              <a:t>Nosso futuro</a:t>
+              <a:t>O futuro</a:t>
             </a:r>
           </a:p>
         </p:txBody>
@@ -10763,7 +10763,7 @@
                 </a:solidFill>
                 <a:latin typeface="Outfit 1 Light"/>
               </a:rPr>
-              <a:t>O que precisamos preservar e desenvolver.</a:t>
+              <a:t>O que preservar e o que desenvolver.</a:t>
             </a:r>
           </a:p>
         </p:txBody>
@@ -10981,7 +10981,7 @@
                 </a:solidFill>
                 <a:latin typeface="Outfit 1 Light"/>
               </a:rPr>
-              <a:t>NOSSA ORIGEM</a:t>
+              <a:t>A ORIGEM</a:t>
             </a:r>
           </a:p>
         </p:txBody>
@@ -11064,7 +11064,7 @@
                 </a:solidFill>
                 <a:latin typeface="Outfit 1 Light"/>
               </a:rPr>
-              <a:t>De onde vem nosso jeito de pensar.</a:t>
+              <a:t>De onde vem o jeito de pensar.</a:t>
             </a:r>
           </a:p>
         </p:txBody>
@@ -11685,7 +11685,7 @@
         </p:nvSpPr>
         <p:spPr>
           <a:xfrm>
-            <a:off x="2011680" y="3229898"/>
+            <a:off x="2011680" y="3153611"/>
             <a:ext cx="1188720" cy="27432"/>
           </a:xfrm>
           <a:prstGeom prst="rect">
@@ -11729,8 +11729,8 @@
         </p:nvSpPr>
         <p:spPr>
           <a:xfrm>
-            <a:off x="2011680" y="3632234"/>
-            <a:ext cx="14081760" cy="2393420"/>
+            <a:off x="2011680" y="3555947"/>
+            <a:ext cx="14081760" cy="2556427"/>
           </a:xfrm>
           <a:prstGeom prst="rect">
             <a:avLst/>
@@ -11749,7 +11749,7 @@
               </a:lnSpc>
             </a:pPr>
             <a:r>
-              <a:rPr sz="3559" i="0" b="0">
+              <a:rPr sz="3833" i="0" b="0">
                 <a:solidFill>
                   <a:srgbClr val="1C1C1A"/>
                 </a:solidFill>
@@ -11765,13 +11765,13 @@
               </a:lnSpc>
             </a:pPr>
             <a:r>
-              <a:rPr sz="3559" i="0" b="0">
+              <a:rPr sz="3833" i="0" b="0">
                 <a:solidFill>
                   <a:srgbClr val="1C1C1A"/>
                 </a:solidFill>
                 <a:latin typeface="Outfit 1 Light"/>
               </a:rPr>
-              <a:t>não nos limitamos ao problema.</a:t>
+              <a:t>a empresa não se limita ao problema.</a:t>
             </a:r>
           </a:p>
           <a:p>
@@ -11781,13 +11781,13 @@
               </a:lnSpc>
             </a:pPr>
             <a:r>
-              <a:rPr sz="3559" i="0" b="0">
+              <a:rPr sz="3833" i="0" b="0">
                 <a:solidFill>
                   <a:srgbClr val="1C1C1A"/>
                 </a:solidFill>
                 <a:latin typeface="Outfit 1 Light"/>
               </a:rPr>
-              <a:t>Procuramos possibilidades para resolvê-lo.</a:t>
+              <a:t>Procura possibilidades para resolvê-lo.</a:t>
             </a:r>
           </a:p>
         </p:txBody>
@@ -11800,7 +11800,7 @@
         </p:nvSpPr>
         <p:spPr>
           <a:xfrm>
-            <a:off x="2011680" y="5999751"/>
+            <a:off x="2011680" y="6076038"/>
             <a:ext cx="11887200" cy="554431"/>
           </a:xfrm>
           <a:prstGeom prst="rect">
@@ -11826,7 +11826,7 @@
                 </a:solidFill>
                 <a:latin typeface="Outfit 1 Light"/>
               </a:rPr>
-              <a:t>A nossa crença de origem.</a:t>
+              <a:t>A crença de origem.</a:t>
             </a:r>
           </a:p>
         </p:txBody>
@@ -12000,7 +12000,7 @@
                 </a:solidFill>
                 <a:latin typeface="Outfit 1 Light"/>
               </a:rPr>
-              <a:t>NOSSOS VALORES</a:t>
+              <a:t>OS VALORES</a:t>
             </a:r>
           </a:p>
         </p:txBody>
@@ -12083,7 +12083,7 @@
                 </a:solidFill>
                 <a:latin typeface="Outfit 1 Light"/>
               </a:rPr>
-              <a:t>Aquilo em que acreditamos e como lideramos.</a:t>
+              <a:t>Aquilo em que a empresa acredita e como ela lidera.</a:t>
             </a:r>
           </a:p>
         </p:txBody>
@@ -12434,7 +12434,7 @@
                 </a:solidFill>
                 <a:latin typeface="Outfit 1 Light"/>
               </a:rPr>
-              <a:t>Assumimos responsabilidade pelo resultado, não apenas pela tarefa.</a:t>
+              <a:t>Responsabilidade pelo resultado, não apenas pela tarefa.</a:t>
             </a:r>
           </a:p>
         </p:txBody>
@@ -12556,7 +12556,7 @@
                 </a:solidFill>
                 <a:latin typeface="Outfit 1 Light"/>
               </a:rPr>
-              <a:t>Temos liberdade para propor, decidir e solucionar.</a:t>
+              <a:t>Liberdade para propor, decidir e solucionar.</a:t>
             </a:r>
           </a:p>
         </p:txBody>
@@ -12678,7 +12678,7 @@
                 </a:solidFill>
                 <a:latin typeface="Outfit 1 Light"/>
               </a:rPr>
-              <a:t>Não aceitamos entregar aquilo que sabemos que pode ser melhor.</a:t>
+              <a:t>Nada é entregue quando ainda pode ser melhor.</a:t>
             </a:r>
           </a:p>
         </p:txBody>
@@ -12800,7 +12800,7 @@
                 </a:solidFill>
                 <a:latin typeface="Outfit 1 Light"/>
               </a:rPr>
-              <a:t>Entendemos que o resultado depende do trabalho de todos.</a:t>
+              <a:t>O resultado depende do trabalho de todos.</a:t>
             </a:r>
           </a:p>
         </p:txBody>
@@ -12922,7 +12922,7 @@
                 </a:solidFill>
                 <a:latin typeface="Outfit 1 Light"/>
               </a:rPr>
-              <a:t>Buscamos aprender, melhorar e ampliar nossas possibilidades.</a:t>
+              <a:t>Aprender, melhorar e ampliar as possibilidades.</a:t>
             </a:r>
           </a:p>
         </p:txBody>

--- a/clientes/flavia-muccelin/Cultura-Organizacional-Forma-e-My-Home.pptx
+++ b/clientes/flavia-muccelin/Cultura-Organizacional-Forma-e-My-Home.pptx
@@ -4418,7 +4418,7 @@
                 </a:solidFill>
                 <a:latin typeface="Outfit 1 Light"/>
               </a:rPr>
-              <a:t>Os comportamentos e as relações que a definem.</a:t>
+              <a:t>Os comportamentos e as relações que definem as duas.</a:t>
             </a:r>
           </a:p>
         </p:txBody>
@@ -5353,7 +5353,7 @@
                 </a:solidFill>
                 <a:latin typeface="Outfit 1 Light"/>
               </a:rPr>
-              <a:t>A PROXIMIDADE É UMA FORÇA DESTA CULTURA.</a:t>
+              <a:t>A PROXIMIDADE É UMA FORÇA NAS DUAS EMPRESAS.</a:t>
             </a:r>
           </a:p>
         </p:txBody>
@@ -7202,7 +7202,7 @@
                 </a:solidFill>
                 <a:latin typeface="Outfit 1 Bold"/>
               </a:rPr>
-              <a:t>ESTA CULTURA</a:t>
+              <a:t>A FORMA E A MY HOME</a:t>
             </a:r>
           </a:p>
         </p:txBody>
@@ -10280,7 +10280,7 @@
                 </a:solidFill>
                 <a:latin typeface="Outfit 1 Light"/>
               </a:rPr>
-              <a:t>Aquilo em que a empresa acredita e como ela lidera.</a:t>
+              <a:t>Aquilo em que as duas empresas acreditam e como lideram.</a:t>
             </a:r>
           </a:p>
         </p:txBody>
@@ -10441,7 +10441,7 @@
                 </a:solidFill>
                 <a:latin typeface="Outfit 1 Light"/>
               </a:rPr>
-              <a:t>Os comportamentos e as relações que a definem.</a:t>
+              <a:t>Os comportamentos e as relações que definem as duas.</a:t>
             </a:r>
           </a:p>
         </p:txBody>
@@ -11685,7 +11685,7 @@
         </p:nvSpPr>
         <p:spPr>
           <a:xfrm>
-            <a:off x="2011680" y="3153611"/>
+            <a:off x="2011680" y="3335402"/>
             <a:ext cx="1188720" cy="27432"/>
           </a:xfrm>
           <a:prstGeom prst="rect">
@@ -11729,8 +11729,8 @@
         </p:nvSpPr>
         <p:spPr>
           <a:xfrm>
-            <a:off x="2011680" y="3555947"/>
-            <a:ext cx="14081760" cy="2556427"/>
+            <a:off x="2011680" y="3737738"/>
+            <a:ext cx="14081760" cy="2167984"/>
           </a:xfrm>
           <a:prstGeom prst="rect">
             <a:avLst/>
@@ -11749,7 +11749,7 @@
               </a:lnSpc>
             </a:pPr>
             <a:r>
-              <a:rPr sz="3833" i="0" b="0">
+              <a:rPr sz="3181" i="0" b="0">
                 <a:solidFill>
                   <a:srgbClr val="1C1C1A"/>
                 </a:solidFill>
@@ -11765,13 +11765,13 @@
               </a:lnSpc>
             </a:pPr>
             <a:r>
-              <a:rPr sz="3833" i="0" b="0">
+              <a:rPr sz="3181" i="0" b="0">
                 <a:solidFill>
                   <a:srgbClr val="1C1C1A"/>
                 </a:solidFill>
                 <a:latin typeface="Outfit 1 Light"/>
               </a:rPr>
-              <a:t>a empresa não se limita ao problema.</a:t>
+              <a:t>a Forma e a My Home não se limitam ao problema.</a:t>
             </a:r>
           </a:p>
           <a:p>
@@ -11781,13 +11781,13 @@
               </a:lnSpc>
             </a:pPr>
             <a:r>
-              <a:rPr sz="3833" i="0" b="0">
+              <a:rPr sz="3181" i="0" b="0">
                 <a:solidFill>
                   <a:srgbClr val="1C1C1A"/>
                 </a:solidFill>
                 <a:latin typeface="Outfit 1 Light"/>
               </a:rPr>
-              <a:t>Procura possibilidades para resolvê-lo.</a:t>
+              <a:t>Procuram possibilidades para resolvê-lo.</a:t>
             </a:r>
           </a:p>
         </p:txBody>
@@ -11800,7 +11800,7 @@
         </p:nvSpPr>
         <p:spPr>
           <a:xfrm>
-            <a:off x="2011680" y="6076038"/>
+            <a:off x="2011680" y="5894247"/>
             <a:ext cx="11887200" cy="554431"/>
           </a:xfrm>
           <a:prstGeom prst="rect">
@@ -12083,7 +12083,7 @@
                 </a:solidFill>
                 <a:latin typeface="Outfit 1 Light"/>
               </a:rPr>
-              <a:t>Aquilo em que a empresa acredita e como ela lidera.</a:t>
+              <a:t>Aquilo em que as duas empresas acreditam e como lideram.</a:t>
             </a:r>
           </a:p>
         </p:txBody>
